--- a/slides (1).pptx
+++ b/slides (1).pptx
@@ -1410,7 +1410,7 @@
         </p:nvSpPr>
         <p:spPr>
           <a:xfrm>
-            <a:off x="0" y="109728"/>
+            <a:off x="5862" y="115590"/>
             <a:ext cx="12191695" cy="6748272"/>
           </a:xfrm>
           <a:prstGeom prst="rect">
@@ -1513,8 +1513,8 @@
         </p:nvSpPr>
         <p:spPr>
           <a:xfrm>
-            <a:off x="713232" y="2788920"/>
-            <a:ext cx="4389120" cy="640080"/>
+            <a:off x="713232" y="2148840"/>
+            <a:ext cx="4389120" cy="1280160"/>
           </a:xfrm>
           <a:prstGeom prst="rect">
             <a:avLst/>
@@ -1535,8 +1535,55 @@
                   <a:srgbClr val="CBD5E1"/>
                 </a:solidFill>
               </a:rPr>
-              <a:t>Nick Gilligan · Kene Nnolim · Ben Volokh</a:t>
-            </a:r>
+              <a:t>Nick Gilligan - I love bagels</a:t>
+            </a:r>
+          </a:p>
+          <a:p>
+            <a:pPr marL="0" indent="0">
+              <a:buNone/>
+            </a:pPr>
+            <a:r>
+              <a:rPr lang="en-US" sz="1300" dirty="0">
+                <a:solidFill>
+                  <a:srgbClr val="CBD5E1"/>
+                </a:solidFill>
+              </a:rPr>
+              <a:t>Kene </a:t>
+            </a:r>
+            <a:r>
+              <a:rPr lang="en-US" sz="1300" dirty="0" err="1">
+                <a:solidFill>
+                  <a:srgbClr val="CBD5E1"/>
+                </a:solidFill>
+              </a:rPr>
+              <a:t>Nnolim</a:t>
+            </a:r>
+            <a:r>
+              <a:rPr lang="en-US" sz="1300" dirty="0">
+                <a:solidFill>
+                  <a:srgbClr val="CBD5E1"/>
+                </a:solidFill>
+              </a:rPr>
+              <a:t> - I speak 5 languages</a:t>
+            </a:r>
+          </a:p>
+          <a:p>
+            <a:pPr marL="0" indent="0">
+              <a:buNone/>
+            </a:pPr>
+            <a:r>
+              <a:rPr lang="en-US" sz="1300" dirty="0">
+                <a:solidFill>
+                  <a:srgbClr val="CBD5E1"/>
+                </a:solidFill>
+              </a:rPr>
+              <a:t>Ben Volokh – I like seltzer-water</a:t>
+            </a:r>
+          </a:p>
+          <a:p>
+            <a:pPr marL="0" indent="0">
+              <a:buNone/>
+            </a:pPr>
             <a:endParaRPr lang="en-US" sz="1300" dirty="0"/>
           </a:p>
           <a:p>
@@ -3730,7 +3777,7 @@
                   <a:srgbClr val="F8FAFC"/>
                 </a:solidFill>
               </a:rPr>
-              <a:t>Discretized weak form actually solved at each Newton step</a:t>
+              <a:t>Discretized weak form solved at each Newton step</a:t>
             </a:r>
             <a:endParaRPr lang="en-US" sz="1600" dirty="0"/>
           </a:p>
